--- a/figures/fig4_v2.pptx
+++ b/figures/fig4_v2.pptx
@@ -211,7 +211,7 @@
           <a:p>
             <a:fld id="{A21AE48D-D7D9-46F8-80AC-255986AD24D4}" type="datetimeFigureOut">
               <a:rPr lang="fr-FR" smtClean="0"/>
-              <a:t>08/07/2025</a:t>
+              <a:t>27/10/2025</a:t>
             </a:fld>
             <a:endParaRPr lang="fr-FR"/>
           </a:p>
@@ -659,7 +659,7 @@
           <a:p>
             <a:fld id="{E6744CE3-0875-4B69-89C0-6F72D8139561}" type="datetimeFigureOut">
               <a:rPr lang="en-GB" smtClean="0"/>
-              <a:t>08/07/2025</a:t>
+              <a:t>27/10/2025</a:t>
             </a:fld>
             <a:endParaRPr lang="en-GB"/>
           </a:p>
@@ -829,7 +829,7 @@
           <a:p>
             <a:fld id="{E6744CE3-0875-4B69-89C0-6F72D8139561}" type="datetimeFigureOut">
               <a:rPr lang="en-GB" smtClean="0"/>
-              <a:t>08/07/2025</a:t>
+              <a:t>27/10/2025</a:t>
             </a:fld>
             <a:endParaRPr lang="en-GB"/>
           </a:p>
@@ -1075,7 +1075,7 @@
           <a:p>
             <a:fld id="{E6744CE3-0875-4B69-89C0-6F72D8139561}" type="datetimeFigureOut">
               <a:rPr lang="en-GB" smtClean="0"/>
-              <a:t>08/07/2025</a:t>
+              <a:t>27/10/2025</a:t>
             </a:fld>
             <a:endParaRPr lang="en-GB"/>
           </a:p>
@@ -1363,7 +1363,7 @@
           <a:p>
             <a:fld id="{E6744CE3-0875-4B69-89C0-6F72D8139561}" type="datetimeFigureOut">
               <a:rPr lang="en-GB" smtClean="0"/>
-              <a:t>08/07/2025</a:t>
+              <a:t>27/10/2025</a:t>
             </a:fld>
             <a:endParaRPr lang="en-GB"/>
           </a:p>
@@ -1785,7 +1785,7 @@
           <a:p>
             <a:fld id="{E6744CE3-0875-4B69-89C0-6F72D8139561}" type="datetimeFigureOut">
               <a:rPr lang="en-GB" smtClean="0"/>
-              <a:t>08/07/2025</a:t>
+              <a:t>27/10/2025</a:t>
             </a:fld>
             <a:endParaRPr lang="en-GB"/>
           </a:p>
@@ -1903,7 +1903,7 @@
           <a:p>
             <a:fld id="{E6744CE3-0875-4B69-89C0-6F72D8139561}" type="datetimeFigureOut">
               <a:rPr lang="en-GB" smtClean="0"/>
-              <a:t>08/07/2025</a:t>
+              <a:t>27/10/2025</a:t>
             </a:fld>
             <a:endParaRPr lang="en-GB"/>
           </a:p>
@@ -1998,7 +1998,7 @@
           <a:p>
             <a:fld id="{E6744CE3-0875-4B69-89C0-6F72D8139561}" type="datetimeFigureOut">
               <a:rPr lang="en-GB" smtClean="0"/>
-              <a:t>08/07/2025</a:t>
+              <a:t>27/10/2025</a:t>
             </a:fld>
             <a:endParaRPr lang="en-GB"/>
           </a:p>
@@ -2211,7 +2211,7 @@
           <a:p>
             <a:fld id="{E6744CE3-0875-4B69-89C0-6F72D8139561}" type="datetimeFigureOut">
               <a:rPr lang="en-GB" smtClean="0"/>
-              <a:t>08/07/2025</a:t>
+              <a:t>27/10/2025</a:t>
             </a:fld>
             <a:endParaRPr lang="en-GB"/>
           </a:p>
@@ -2584,10 +2584,10 @@
       </p:grpSpPr>
       <p:pic>
         <p:nvPicPr>
-          <p:cNvPr id="2" name="Image 1">
+          <p:cNvPr id="3" name="Image 2">
             <a:extLst>
               <a:ext uri="{FF2B5EF4-FFF2-40B4-BE49-F238E27FC236}">
-                <a16:creationId xmlns:a16="http://schemas.microsoft.com/office/drawing/2014/main" id="{47B11B5A-944A-44E6-AB21-2EE440C4C7D9}"/>
+                <a16:creationId xmlns:a16="http://schemas.microsoft.com/office/drawing/2014/main" id="{FF2DAEEE-16F1-49B4-AC53-7DCA51876A7E}"/>
               </a:ext>
             </a:extLst>
           </p:cNvPr>
@@ -2604,8 +2604,8 @@
         </p:blipFill>
         <p:spPr>
           <a:xfrm>
-            <a:off x="344574" y="-1"/>
-            <a:ext cx="11910840" cy="8640763"/>
+            <a:off x="477968" y="0"/>
+            <a:ext cx="11644052" cy="8447221"/>
           </a:xfrm>
           <a:prstGeom prst="rect">
             <a:avLst/>
